--- a/Stencil shapes.pptx
+++ b/Stencil shapes.pptx
@@ -441,7 +441,7 @@
           <a:p>
             <a:fld id="{7E003B51-10B1-EF48-9056-D232E53DF56A}" type="datetimeFigureOut">
               <a:rPr lang="en-US" smtClean="0"/>
-              <a:t>8/27/26</a:t>
+              <a:t>10/12/26</a:t>
             </a:fld>
             <a:endParaRPr lang="en-US"/>
           </a:p>
@@ -639,7 +639,7 @@
           <a:p>
             <a:fld id="{7E003B51-10B1-EF48-9056-D232E53DF56A}" type="datetimeFigureOut">
               <a:rPr lang="en-US" smtClean="0"/>
-              <a:t>8/27/26</a:t>
+              <a:t>10/12/26</a:t>
             </a:fld>
             <a:endParaRPr lang="en-US"/>
           </a:p>
@@ -847,7 +847,7 @@
           <a:p>
             <a:fld id="{7E003B51-10B1-EF48-9056-D232E53DF56A}" type="datetimeFigureOut">
               <a:rPr lang="en-US" smtClean="0"/>
-              <a:t>8/27/26</a:t>
+              <a:t>10/12/26</a:t>
             </a:fld>
             <a:endParaRPr lang="en-US"/>
           </a:p>
@@ -1045,7 +1045,7 @@
           <a:p>
             <a:fld id="{7E003B51-10B1-EF48-9056-D232E53DF56A}" type="datetimeFigureOut">
               <a:rPr lang="en-US" smtClean="0"/>
-              <a:t>8/27/26</a:t>
+              <a:t>10/12/26</a:t>
             </a:fld>
             <a:endParaRPr lang="en-US"/>
           </a:p>
@@ -1320,7 +1320,7 @@
           <a:p>
             <a:fld id="{7E003B51-10B1-EF48-9056-D232E53DF56A}" type="datetimeFigureOut">
               <a:rPr lang="en-US" smtClean="0"/>
-              <a:t>8/27/26</a:t>
+              <a:t>10/12/26</a:t>
             </a:fld>
             <a:endParaRPr lang="en-US"/>
           </a:p>
@@ -1585,7 +1585,7 @@
           <a:p>
             <a:fld id="{7E003B51-10B1-EF48-9056-D232E53DF56A}" type="datetimeFigureOut">
               <a:rPr lang="en-US" smtClean="0"/>
-              <a:t>8/27/26</a:t>
+              <a:t>10/12/26</a:t>
             </a:fld>
             <a:endParaRPr lang="en-US"/>
           </a:p>
@@ -1997,7 +1997,7 @@
           <a:p>
             <a:fld id="{7E003B51-10B1-EF48-9056-D232E53DF56A}" type="datetimeFigureOut">
               <a:rPr lang="en-US" smtClean="0"/>
-              <a:t>8/27/26</a:t>
+              <a:t>10/12/26</a:t>
             </a:fld>
             <a:endParaRPr lang="en-US"/>
           </a:p>
@@ -2138,7 +2138,7 @@
           <a:p>
             <a:fld id="{7E003B51-10B1-EF48-9056-D232E53DF56A}" type="datetimeFigureOut">
               <a:rPr lang="en-US" smtClean="0"/>
-              <a:t>8/27/26</a:t>
+              <a:t>10/12/26</a:t>
             </a:fld>
             <a:endParaRPr lang="en-US"/>
           </a:p>
@@ -2251,7 +2251,7 @@
           <a:p>
             <a:fld id="{7E003B51-10B1-EF48-9056-D232E53DF56A}" type="datetimeFigureOut">
               <a:rPr lang="en-US" smtClean="0"/>
-              <a:t>8/27/26</a:t>
+              <a:t>10/12/26</a:t>
             </a:fld>
             <a:endParaRPr lang="en-US"/>
           </a:p>
@@ -2562,7 +2562,7 @@
           <a:p>
             <a:fld id="{7E003B51-10B1-EF48-9056-D232E53DF56A}" type="datetimeFigureOut">
               <a:rPr lang="en-US" smtClean="0"/>
-              <a:t>8/27/26</a:t>
+              <a:t>10/12/26</a:t>
             </a:fld>
             <a:endParaRPr lang="en-US"/>
           </a:p>
@@ -2850,7 +2850,7 @@
           <a:p>
             <a:fld id="{7E003B51-10B1-EF48-9056-D232E53DF56A}" type="datetimeFigureOut">
               <a:rPr lang="en-US" smtClean="0"/>
-              <a:t>8/27/26</a:t>
+              <a:t>10/12/26</a:t>
             </a:fld>
             <a:endParaRPr lang="en-US"/>
           </a:p>
@@ -3091,7 +3091,7 @@
           <a:p>
             <a:fld id="{7E003B51-10B1-EF48-9056-D232E53DF56A}" type="datetimeFigureOut">
               <a:rPr lang="en-US" smtClean="0"/>
-              <a:t>8/27/26</a:t>
+              <a:t>10/12/26</a:t>
             </a:fld>
             <a:endParaRPr lang="en-US"/>
           </a:p>
@@ -17512,8 +17512,8 @@
         </p:nvSpPr>
         <p:spPr>
           <a:xfrm>
-            <a:off x="3860236" y="2457875"/>
-            <a:ext cx="2444878" cy="1063274"/>
+            <a:off x="4342168" y="2457875"/>
+            <a:ext cx="1962945" cy="1063274"/>
           </a:xfrm>
           <a:prstGeom prst="rect">
             <a:avLst/>
@@ -17683,8 +17683,8 @@
           </a:p>
         </p:txBody>
       </p:sp>
-      <mc:AlternateContent xmlns:mc="http://schemas.openxmlformats.org/markup-compatibility/2006">
-        <mc:Choice xmlns:p14="http://schemas.microsoft.com/office/powerpoint/2010/main" Requires="p14">
+      <mc:AlternateContent xmlns:mc="http://schemas.openxmlformats.org/markup-compatibility/2006" xmlns:p14="http://schemas.microsoft.com/office/powerpoint/2010/main">
+        <mc:Choice Requires="p14">
           <p:contentPart p14:bwMode="auto" r:id="rId2">
             <p14:nvContentPartPr>
               <p14:cNvPr id="76" name="Ink 75">
@@ -17703,7 +17703,7 @@
             </p14:xfrm>
           </p:contentPart>
         </mc:Choice>
-        <mc:Fallback>
+        <mc:Fallback xmlns="">
           <p:pic>
             <p:nvPicPr>
               <p:cNvPr id="76" name="Ink 75">
@@ -17734,8 +17734,8 @@
           </p:pic>
         </mc:Fallback>
       </mc:AlternateContent>
-      <mc:AlternateContent xmlns:mc="http://schemas.openxmlformats.org/markup-compatibility/2006">
-        <mc:Choice xmlns:p14="http://schemas.microsoft.com/office/powerpoint/2010/main" Requires="p14">
+      <mc:AlternateContent xmlns:mc="http://schemas.openxmlformats.org/markup-compatibility/2006" xmlns:p14="http://schemas.microsoft.com/office/powerpoint/2010/main">
+        <mc:Choice Requires="p14">
           <p:contentPart p14:bwMode="auto" r:id="rId4">
             <p14:nvContentPartPr>
               <p14:cNvPr id="77" name="Ink 76">
@@ -17754,7 +17754,7 @@
             </p14:xfrm>
           </p:contentPart>
         </mc:Choice>
-        <mc:Fallback>
+        <mc:Fallback xmlns="">
           <p:pic>
             <p:nvPicPr>
               <p:cNvPr id="77" name="Ink 76">
@@ -17831,8 +17831,8 @@
           </a:p>
         </p:txBody>
       </p:sp>
-      <mc:AlternateContent xmlns:mc="http://schemas.openxmlformats.org/markup-compatibility/2006">
-        <mc:Choice xmlns:p14="http://schemas.microsoft.com/office/powerpoint/2010/main" Requires="p14">
+      <mc:AlternateContent xmlns:mc="http://schemas.openxmlformats.org/markup-compatibility/2006" xmlns:p14="http://schemas.microsoft.com/office/powerpoint/2010/main">
+        <mc:Choice Requires="p14">
           <p:contentPart p14:bwMode="auto" r:id="rId5">
             <p14:nvContentPartPr>
               <p14:cNvPr id="85" name="Ink 84">
@@ -17851,7 +17851,7 @@
             </p14:xfrm>
           </p:contentPart>
         </mc:Choice>
-        <mc:Fallback>
+        <mc:Fallback xmlns="">
           <p:pic>
             <p:nvPicPr>
               <p:cNvPr id="85" name="Ink 84">
@@ -17882,8 +17882,8 @@
           </p:pic>
         </mc:Fallback>
       </mc:AlternateContent>
-      <mc:AlternateContent xmlns:mc="http://schemas.openxmlformats.org/markup-compatibility/2006">
-        <mc:Choice xmlns:p14="http://schemas.microsoft.com/office/powerpoint/2010/main" Requires="p14">
+      <mc:AlternateContent xmlns:mc="http://schemas.openxmlformats.org/markup-compatibility/2006" xmlns:p14="http://schemas.microsoft.com/office/powerpoint/2010/main">
+        <mc:Choice Requires="p14">
           <p:contentPart p14:bwMode="auto" r:id="rId7">
             <p14:nvContentPartPr>
               <p14:cNvPr id="86" name="Ink 85">
@@ -17902,7 +17902,7 @@
             </p14:xfrm>
           </p:contentPart>
         </mc:Choice>
-        <mc:Fallback>
+        <mc:Fallback xmlns="">
           <p:pic>
             <p:nvPicPr>
               <p:cNvPr id="86" name="Ink 85">
@@ -17933,8 +17933,8 @@
           </p:pic>
         </mc:Fallback>
       </mc:AlternateContent>
-      <mc:AlternateContent xmlns:mc="http://schemas.openxmlformats.org/markup-compatibility/2006">
-        <mc:Choice xmlns:p14="http://schemas.microsoft.com/office/powerpoint/2010/main" Requires="p14">
+      <mc:AlternateContent xmlns:mc="http://schemas.openxmlformats.org/markup-compatibility/2006" xmlns:p14="http://schemas.microsoft.com/office/powerpoint/2010/main">
+        <mc:Choice Requires="p14">
           <p:contentPart p14:bwMode="auto" r:id="rId9">
             <p14:nvContentPartPr>
               <p14:cNvPr id="87" name="Ink 86">
@@ -17953,7 +17953,7 @@
             </p14:xfrm>
           </p:contentPart>
         </mc:Choice>
-        <mc:Fallback>
+        <mc:Fallback xmlns="">
           <p:pic>
             <p:nvPicPr>
               <p:cNvPr id="87" name="Ink 86">
@@ -17984,8 +17984,8 @@
           </p:pic>
         </mc:Fallback>
       </mc:AlternateContent>
-      <mc:AlternateContent xmlns:mc="http://schemas.openxmlformats.org/markup-compatibility/2006">
-        <mc:Choice xmlns:p14="http://schemas.microsoft.com/office/powerpoint/2010/main" Requires="p14">
+      <mc:AlternateContent xmlns:mc="http://schemas.openxmlformats.org/markup-compatibility/2006" xmlns:p14="http://schemas.microsoft.com/office/powerpoint/2010/main">
+        <mc:Choice Requires="p14">
           <p:contentPart p14:bwMode="auto" r:id="rId11">
             <p14:nvContentPartPr>
               <p14:cNvPr id="88" name="Ink 87">
@@ -18004,7 +18004,7 @@
             </p14:xfrm>
           </p:contentPart>
         </mc:Choice>
-        <mc:Fallback>
+        <mc:Fallback xmlns="">
           <p:pic>
             <p:nvPicPr>
               <p:cNvPr id="88" name="Ink 87">
@@ -18081,23 +18081,7 @@
                   <a:srgbClr val="FF0000"/>
                 </a:solidFill>
               </a:rPr>
-              <a:t>Runge-</a:t>
-            </a:r>
-            <a:r>
-              <a:rPr lang="en-US" dirty="0" err="1">
-                <a:solidFill>
-                  <a:srgbClr val="FF0000"/>
-                </a:solidFill>
-              </a:rPr>
-              <a:t>Kutta</a:t>
-            </a:r>
-            <a:r>
-              <a:rPr lang="en-US" dirty="0">
-                <a:solidFill>
-                  <a:srgbClr val="FF0000"/>
-                </a:solidFill>
-              </a:rPr>
-              <a:t> 4</a:t>
+              <a:t>Runge-Kutta 4</a:t>
             </a:r>
             <a:r>
               <a:rPr lang="en-US" dirty="0"/>
